--- a/Documents/Poster.pptx
+++ b/Documents/Poster.pptx
@@ -4297,7 +4297,7 @@
                 <a:cs typeface="Times New Roman" panose="02020603050405020304" charset="0"/>
                 <a:sym typeface="+mn-ea"/>
               </a:rPr>
-              <a:t>  Md. Golam Rabbani &amp; Rabeya Khatun Mokta </a:t>
+              <a:t>  Md. Golam Rabbani </a:t>
             </a:r>
             <a:endParaRPr lang="en-US" altLang="en-US" sz="4200" dirty="0">
               <a:solidFill>
